--- a/LEARNING/Power BI/New Microsoft PowerPoint Presentation.pptx
+++ b/LEARNING/Power BI/New Microsoft PowerPoint Presentation.pptx
@@ -6,7 +6,8 @@
   </p:sldMasterIdLst>
   <p:sldIdLst>
     <p:sldId id="256" r:id="rId2"/>
-    <p:sldId id="257" r:id="rId3"/>
+    <p:sldId id="258" r:id="rId3"/>
+    <p:sldId id="257" r:id="rId4"/>
   </p:sldIdLst>
   <p:sldSz cx="12192000" cy="6858000"/>
   <p:notesSz cx="6858000" cy="9144000"/>
@@ -105,7 +106,20 @@
       </a:defRPr>
     </a:lvl9pPr>
   </p:defaultTextStyle>
+  <p:extLst>
+    <p:ext uri="{EFAFB233-063F-42B5-8137-9DF3F51BA10A}">
+      <p15:sldGuideLst xmlns:p15="http://schemas.microsoft.com/office/powerpoint/2012/main"/>
+    </p:ext>
+  </p:extLst>
 </p:presentation>
+</file>
+
+<file path=ppt/revisionInfo.xml><?xml version="1.0" encoding="utf-8"?>
+<p1510:revInfo xmlns:a="http://schemas.openxmlformats.org/drawingml/2006/main" xmlns:r="http://schemas.openxmlformats.org/officeDocument/2006/relationships" xmlns:p1510="http://schemas.microsoft.com/office/powerpoint/2015/10/main">
+  <p1510:revLst>
+    <p1510:client id="{D4440840-4555-4974-B93A-CE105F052BB9}" v="13" dt="2026-08-11T07:07:58.011"/>
+  </p1510:revLst>
+</p1510:revInfo>
 </file>
 
 <file path=ppt/changesInfos/changesInfo1.xml><?xml version="1.0" encoding="utf-8"?>
@@ -210,14 +224,6 @@
             <ac:spMk id="53" creationId="{3CF62234-7D1B-13EF-F0F2-637B836DB880}"/>
           </ac:spMkLst>
         </pc:spChg>
-        <pc:spChg chg="add del">
-          <ac:chgData name="vasanth kumar" userId="81af875725a2a030" providerId="LiveId" clId="{ADDC219A-1259-42D0-BAF0-2C1E4857BA88}" dt="2026-08-08T01:57:54.316" v="226" actId="478"/>
-          <ac:spMkLst>
-            <pc:docMk/>
-            <pc:sldMk cId="442327232" sldId="257"/>
-            <ac:spMk id="66" creationId="{2192D938-D08B-CE73-E6F8-BFB6500F48BD}"/>
-          </ac:spMkLst>
-        </pc:spChg>
         <pc:spChg chg="add mod">
           <ac:chgData name="vasanth kumar" userId="81af875725a2a030" providerId="LiveId" clId="{ADDC219A-1259-42D0-BAF0-2C1E4857BA88}" dt="2026-08-08T01:59:42.157" v="232" actId="1076"/>
           <ac:spMkLst>
@@ -274,14 +280,6 @@
             <ac:cxnSpMk id="18" creationId="{57A9B247-856A-8535-15D8-9EF49410D03F}"/>
           </ac:cxnSpMkLst>
         </pc:cxnChg>
-        <pc:cxnChg chg="add del mod">
-          <ac:chgData name="vasanth kumar" userId="81af875725a2a030" providerId="LiveId" clId="{ADDC219A-1259-42D0-BAF0-2C1E4857BA88}" dt="2026-08-08T01:52:34.792" v="193" actId="478"/>
-          <ac:cxnSpMkLst>
-            <pc:docMk/>
-            <pc:sldMk cId="442327232" sldId="257"/>
-            <ac:cxnSpMk id="24" creationId="{BED8DC47-7AD1-F7F7-CA3A-CC0DDF41854C}"/>
-          </ac:cxnSpMkLst>
-        </pc:cxnChg>
         <pc:cxnChg chg="add mod">
           <ac:chgData name="vasanth kumar" userId="81af875725a2a030" providerId="LiveId" clId="{ADDC219A-1259-42D0-BAF0-2C1E4857BA88}" dt="2026-08-08T01:53:46.951" v="203" actId="14100"/>
           <ac:cxnSpMkLst>
@@ -333,6 +331,157 @@
       </pc:sldChg>
     </pc:docChg>
   </pc:docChgLst>
+  <pc:docChgLst>
+    <pc:chgData name="Vasanth Kumar" userId="3489f436-c3e9-41c0-80d7-83a98f4a7d92" providerId="ADAL" clId="{D4440840-4555-4974-B93A-CE105F052BB9}"/>
+    <pc:docChg chg="addSld modSld">
+      <pc:chgData name="Vasanth Kumar" userId="3489f436-c3e9-41c0-80d7-83a98f4a7d92" providerId="ADAL" clId="{D4440840-4555-4974-B93A-CE105F052BB9}" dt="2026-08-11T07:08:31.800" v="364" actId="1037"/>
+      <pc:docMkLst>
+        <pc:docMk/>
+      </pc:docMkLst>
+      <pc:sldChg chg="addSp modSp mod">
+        <pc:chgData name="Vasanth Kumar" userId="3489f436-c3e9-41c0-80d7-83a98f4a7d92" providerId="ADAL" clId="{D4440840-4555-4974-B93A-CE105F052BB9}" dt="2026-08-11T06:56:04.747" v="37" actId="14100"/>
+        <pc:sldMkLst>
+          <pc:docMk/>
+          <pc:sldMk cId="442327232" sldId="257"/>
+        </pc:sldMkLst>
+        <pc:spChg chg="mod">
+          <ac:chgData name="Vasanth Kumar" userId="3489f436-c3e9-41c0-80d7-83a98f4a7d92" providerId="ADAL" clId="{D4440840-4555-4974-B93A-CE105F052BB9}" dt="2026-08-11T06:55:48.386" v="33" actId="1076"/>
+          <ac:spMkLst>
+            <pc:docMk/>
+            <pc:sldMk cId="442327232" sldId="257"/>
+            <ac:spMk id="7" creationId="{317F96D1-FCFF-71F2-2B79-46B25F8F59E9}"/>
+          </ac:spMkLst>
+        </pc:spChg>
+        <pc:spChg chg="add mod">
+          <ac:chgData name="Vasanth Kumar" userId="3489f436-c3e9-41c0-80d7-83a98f4a7d92" providerId="ADAL" clId="{D4440840-4555-4974-B93A-CE105F052BB9}" dt="2026-08-11T06:55:53.706" v="34" actId="1076"/>
+          <ac:spMkLst>
+            <pc:docMk/>
+            <pc:sldMk cId="442327232" sldId="257"/>
+            <ac:spMk id="8" creationId="{5C866E3A-AD2F-ABA6-52F1-0C3ABD2D03DB}"/>
+          </ac:spMkLst>
+        </pc:spChg>
+        <pc:cxnChg chg="add mod">
+          <ac:chgData name="Vasanth Kumar" userId="3489f436-c3e9-41c0-80d7-83a98f4a7d92" providerId="ADAL" clId="{D4440840-4555-4974-B93A-CE105F052BB9}" dt="2026-08-11T06:55:53.706" v="34" actId="1076"/>
+          <ac:cxnSpMkLst>
+            <pc:docMk/>
+            <pc:sldMk cId="442327232" sldId="257"/>
+            <ac:cxnSpMk id="10" creationId="{CE6D113B-E51B-499C-4CF9-3C67F35663D5}"/>
+          </ac:cxnSpMkLst>
+        </pc:cxnChg>
+        <pc:cxnChg chg="mod">
+          <ac:chgData name="Vasanth Kumar" userId="3489f436-c3e9-41c0-80d7-83a98f4a7d92" providerId="ADAL" clId="{D4440840-4555-4974-B93A-CE105F052BB9}" dt="2026-08-11T06:55:48.386" v="33" actId="1076"/>
+          <ac:cxnSpMkLst>
+            <pc:docMk/>
+            <pc:sldMk cId="442327232" sldId="257"/>
+            <ac:cxnSpMk id="11" creationId="{11185048-2C3F-9161-69E2-BE0E000F71F6}"/>
+          </ac:cxnSpMkLst>
+        </pc:cxnChg>
+        <pc:cxnChg chg="mod">
+          <ac:chgData name="Vasanth Kumar" userId="3489f436-c3e9-41c0-80d7-83a98f4a7d92" providerId="ADAL" clId="{D4440840-4555-4974-B93A-CE105F052BB9}" dt="2026-08-11T06:55:48.386" v="33" actId="1076"/>
+          <ac:cxnSpMkLst>
+            <pc:docMk/>
+            <pc:sldMk cId="442327232" sldId="257"/>
+            <ac:cxnSpMk id="18" creationId="{57A9B247-856A-8535-15D8-9EF49410D03F}"/>
+          </ac:cxnSpMkLst>
+        </pc:cxnChg>
+        <pc:cxnChg chg="add mod">
+          <ac:chgData name="Vasanth Kumar" userId="3489f436-c3e9-41c0-80d7-83a98f4a7d92" providerId="ADAL" clId="{D4440840-4555-4974-B93A-CE105F052BB9}" dt="2026-08-11T06:56:04.747" v="37" actId="14100"/>
+          <ac:cxnSpMkLst>
+            <pc:docMk/>
+            <pc:sldMk cId="442327232" sldId="257"/>
+            <ac:cxnSpMk id="25" creationId="{07E62AB7-3895-4B87-9764-3D78B31D6A68}"/>
+          </ac:cxnSpMkLst>
+        </pc:cxnChg>
+      </pc:sldChg>
+      <pc:sldChg chg="addSp modSp new mod">
+        <pc:chgData name="Vasanth Kumar" userId="3489f436-c3e9-41c0-80d7-83a98f4a7d92" providerId="ADAL" clId="{D4440840-4555-4974-B93A-CE105F052BB9}" dt="2026-08-11T07:08:31.800" v="364" actId="1037"/>
+        <pc:sldMkLst>
+          <pc:docMk/>
+          <pc:sldMk cId="3743157601" sldId="258"/>
+        </pc:sldMkLst>
+        <pc:spChg chg="add mod">
+          <ac:chgData name="Vasanth Kumar" userId="3489f436-c3e9-41c0-80d7-83a98f4a7d92" providerId="ADAL" clId="{D4440840-4555-4974-B93A-CE105F052BB9}" dt="2026-08-11T07:06:02.379" v="111" actId="1076"/>
+          <ac:spMkLst>
+            <pc:docMk/>
+            <pc:sldMk cId="3743157601" sldId="258"/>
+            <ac:spMk id="2" creationId="{5D7DDFB6-94A5-CBE2-B1B0-662B5D0EC71F}"/>
+          </ac:spMkLst>
+        </pc:spChg>
+        <pc:spChg chg="add mod">
+          <ac:chgData name="Vasanth Kumar" userId="3489f436-c3e9-41c0-80d7-83a98f4a7d92" providerId="ADAL" clId="{D4440840-4555-4974-B93A-CE105F052BB9}" dt="2026-08-11T07:05:59.656" v="110" actId="1076"/>
+          <ac:spMkLst>
+            <pc:docMk/>
+            <pc:sldMk cId="3743157601" sldId="258"/>
+            <ac:spMk id="3" creationId="{558C27AA-FAF0-5371-2045-DB204F27DCC6}"/>
+          </ac:spMkLst>
+        </pc:spChg>
+        <pc:spChg chg="add mod">
+          <ac:chgData name="Vasanth Kumar" userId="3489f436-c3e9-41c0-80d7-83a98f4a7d92" providerId="ADAL" clId="{D4440840-4555-4974-B93A-CE105F052BB9}" dt="2026-08-11T07:05:00.174" v="101" actId="1076"/>
+          <ac:spMkLst>
+            <pc:docMk/>
+            <pc:sldMk cId="3743157601" sldId="258"/>
+            <ac:spMk id="4" creationId="{A794000E-A165-695B-F226-720DC2A652D3}"/>
+          </ac:spMkLst>
+        </pc:spChg>
+        <pc:spChg chg="add mod">
+          <ac:chgData name="Vasanth Kumar" userId="3489f436-c3e9-41c0-80d7-83a98f4a7d92" providerId="ADAL" clId="{D4440840-4555-4974-B93A-CE105F052BB9}" dt="2026-08-11T07:05:56.815" v="109" actId="1076"/>
+          <ac:spMkLst>
+            <pc:docMk/>
+            <pc:sldMk cId="3743157601" sldId="258"/>
+            <ac:spMk id="5" creationId="{537E69FF-CD58-1BB2-43C9-5BB95AE44689}"/>
+          </ac:spMkLst>
+        </pc:spChg>
+        <pc:spChg chg="add mod">
+          <ac:chgData name="Vasanth Kumar" userId="3489f436-c3e9-41c0-80d7-83a98f4a7d92" providerId="ADAL" clId="{D4440840-4555-4974-B93A-CE105F052BB9}" dt="2026-08-11T07:07:10.063" v="221" actId="1036"/>
+          <ac:spMkLst>
+            <pc:docMk/>
+            <pc:sldMk cId="3743157601" sldId="258"/>
+            <ac:spMk id="20" creationId="{CD85FA12-36E0-7AD5-4BD4-F51E58FFC6E1}"/>
+          </ac:spMkLst>
+        </pc:spChg>
+        <pc:spChg chg="add mod">
+          <ac:chgData name="Vasanth Kumar" userId="3489f436-c3e9-41c0-80d7-83a98f4a7d92" providerId="ADAL" clId="{D4440840-4555-4974-B93A-CE105F052BB9}" dt="2026-08-11T07:08:31.800" v="364" actId="1037"/>
+          <ac:spMkLst>
+            <pc:docMk/>
+            <pc:sldMk cId="3743157601" sldId="258"/>
+            <ac:spMk id="21" creationId="{AB807D75-8460-6E53-F0B9-A2159A5843BD}"/>
+          </ac:spMkLst>
+        </pc:spChg>
+        <pc:spChg chg="add mod">
+          <ac:chgData name="Vasanth Kumar" userId="3489f436-c3e9-41c0-80d7-83a98f4a7d92" providerId="ADAL" clId="{D4440840-4555-4974-B93A-CE105F052BB9}" dt="2026-08-11T07:08:26.288" v="355" actId="122"/>
+          <ac:spMkLst>
+            <pc:docMk/>
+            <pc:sldMk cId="3743157601" sldId="258"/>
+            <ac:spMk id="22" creationId="{DF2D6616-49B3-79AF-9F3E-E41B3F558954}"/>
+          </ac:spMkLst>
+        </pc:spChg>
+        <pc:cxnChg chg="add mod">
+          <ac:chgData name="Vasanth Kumar" userId="3489f436-c3e9-41c0-80d7-83a98f4a7d92" providerId="ADAL" clId="{D4440840-4555-4974-B93A-CE105F052BB9}" dt="2026-08-11T07:06:02.379" v="111" actId="1076"/>
+          <ac:cxnSpMkLst>
+            <pc:docMk/>
+            <pc:sldMk cId="3743157601" sldId="258"/>
+            <ac:cxnSpMk id="6" creationId="{C1CF8FB9-D54C-5AA8-91EE-43FA4B68C2BE}"/>
+          </ac:cxnSpMkLst>
+        </pc:cxnChg>
+        <pc:cxnChg chg="add mod">
+          <ac:chgData name="Vasanth Kumar" userId="3489f436-c3e9-41c0-80d7-83a98f4a7d92" providerId="ADAL" clId="{D4440840-4555-4974-B93A-CE105F052BB9}" dt="2026-08-11T07:05:59.656" v="110" actId="1076"/>
+          <ac:cxnSpMkLst>
+            <pc:docMk/>
+            <pc:sldMk cId="3743157601" sldId="258"/>
+            <ac:cxnSpMk id="10" creationId="{790640C6-7B1F-1810-74E5-4733080A778A}"/>
+          </ac:cxnSpMkLst>
+        </pc:cxnChg>
+        <pc:cxnChg chg="add mod">
+          <ac:chgData name="Vasanth Kumar" userId="3489f436-c3e9-41c0-80d7-83a98f4a7d92" providerId="ADAL" clId="{D4440840-4555-4974-B93A-CE105F052BB9}" dt="2026-08-11T07:05:56.815" v="109" actId="1076"/>
+          <ac:cxnSpMkLst>
+            <pc:docMk/>
+            <pc:sldMk cId="3743157601" sldId="258"/>
+            <ac:cxnSpMk id="13" creationId="{7B3E5C37-0342-82B6-45AA-4F68AC07D85E}"/>
+          </ac:cxnSpMkLst>
+        </pc:cxnChg>
+      </pc:sldChg>
+    </pc:docChg>
+  </pc:docChgLst>
 </pc:chgInfo>
 </file>
 
@@ -485,7 +634,7 @@
           <a:p>
             <a:fld id="{4822FB37-5E40-40F8-9F29-FDDD84D9B0B9}" type="datetimeFigureOut">
               <a:rPr lang="en-IN" smtClean="0"/>
-              <a:t>08-08-2026</a:t>
+              <a:t>11-08-2026</a:t>
             </a:fld>
             <a:endParaRPr lang="en-IN"/>
           </a:p>
@@ -685,7 +834,7 @@
           <a:p>
             <a:fld id="{4822FB37-5E40-40F8-9F29-FDDD84D9B0B9}" type="datetimeFigureOut">
               <a:rPr lang="en-IN" smtClean="0"/>
-              <a:t>08-08-2026</a:t>
+              <a:t>11-08-2026</a:t>
             </a:fld>
             <a:endParaRPr lang="en-IN"/>
           </a:p>
@@ -895,7 +1044,7 @@
           <a:p>
             <a:fld id="{4822FB37-5E40-40F8-9F29-FDDD84D9B0B9}" type="datetimeFigureOut">
               <a:rPr lang="en-IN" smtClean="0"/>
-              <a:t>08-08-2026</a:t>
+              <a:t>11-08-2026</a:t>
             </a:fld>
             <a:endParaRPr lang="en-IN"/>
           </a:p>
@@ -1095,7 +1244,7 @@
           <a:p>
             <a:fld id="{4822FB37-5E40-40F8-9F29-FDDD84D9B0B9}" type="datetimeFigureOut">
               <a:rPr lang="en-IN" smtClean="0"/>
-              <a:t>08-08-2026</a:t>
+              <a:t>11-08-2026</a:t>
             </a:fld>
             <a:endParaRPr lang="en-IN"/>
           </a:p>
@@ -1371,7 +1520,7 @@
           <a:p>
             <a:fld id="{4822FB37-5E40-40F8-9F29-FDDD84D9B0B9}" type="datetimeFigureOut">
               <a:rPr lang="en-IN" smtClean="0"/>
-              <a:t>08-08-2026</a:t>
+              <a:t>11-08-2026</a:t>
             </a:fld>
             <a:endParaRPr lang="en-IN"/>
           </a:p>
@@ -1639,7 +1788,7 @@
           <a:p>
             <a:fld id="{4822FB37-5E40-40F8-9F29-FDDD84D9B0B9}" type="datetimeFigureOut">
               <a:rPr lang="en-IN" smtClean="0"/>
-              <a:t>08-08-2026</a:t>
+              <a:t>11-08-2026</a:t>
             </a:fld>
             <a:endParaRPr lang="en-IN"/>
           </a:p>
@@ -2054,7 +2203,7 @@
           <a:p>
             <a:fld id="{4822FB37-5E40-40F8-9F29-FDDD84D9B0B9}" type="datetimeFigureOut">
               <a:rPr lang="en-IN" smtClean="0"/>
-              <a:t>08-08-2026</a:t>
+              <a:t>11-08-2026</a:t>
             </a:fld>
             <a:endParaRPr lang="en-IN"/>
           </a:p>
@@ -2196,7 +2345,7 @@
           <a:p>
             <a:fld id="{4822FB37-5E40-40F8-9F29-FDDD84D9B0B9}" type="datetimeFigureOut">
               <a:rPr lang="en-IN" smtClean="0"/>
-              <a:t>08-08-2026</a:t>
+              <a:t>11-08-2026</a:t>
             </a:fld>
             <a:endParaRPr lang="en-IN"/>
           </a:p>
@@ -2309,7 +2458,7 @@
           <a:p>
             <a:fld id="{4822FB37-5E40-40F8-9F29-FDDD84D9B0B9}" type="datetimeFigureOut">
               <a:rPr lang="en-IN" smtClean="0"/>
-              <a:t>08-08-2026</a:t>
+              <a:t>11-08-2026</a:t>
             </a:fld>
             <a:endParaRPr lang="en-IN"/>
           </a:p>
@@ -2622,7 +2771,7 @@
           <a:p>
             <a:fld id="{4822FB37-5E40-40F8-9F29-FDDD84D9B0B9}" type="datetimeFigureOut">
               <a:rPr lang="en-IN" smtClean="0"/>
-              <a:t>08-08-2026</a:t>
+              <a:t>11-08-2026</a:t>
             </a:fld>
             <a:endParaRPr lang="en-IN"/>
           </a:p>
@@ -2911,7 +3060,7 @@
           <a:p>
             <a:fld id="{4822FB37-5E40-40F8-9F29-FDDD84D9B0B9}" type="datetimeFigureOut">
               <a:rPr lang="en-IN" smtClean="0"/>
-              <a:t>08-08-2026</a:t>
+              <a:t>11-08-2026</a:t>
             </a:fld>
             <a:endParaRPr lang="en-IN"/>
           </a:p>
@@ -3154,7 +3303,7 @@
           <a:p>
             <a:fld id="{4822FB37-5E40-40F8-9F29-FDDD84D9B0B9}" type="datetimeFigureOut">
               <a:rPr lang="en-IN" smtClean="0"/>
-              <a:t>08-08-2026</a:t>
+              <a:t>11-08-2026</a:t>
             </a:fld>
             <a:endParaRPr lang="en-IN"/>
           </a:p>
@@ -3656,7 +3805,7 @@
           <p:cNvPr id="2" name="TextBox 1">
             <a:extLst>
               <a:ext uri="{FF2B5EF4-FFF2-40B4-BE49-F238E27FC236}">
-                <a16:creationId xmlns:a16="http://schemas.microsoft.com/office/drawing/2014/main" id="{0325F2A5-39AF-28FE-0AB1-D3C8721C39F8}"/>
+                <a16:creationId xmlns:a16="http://schemas.microsoft.com/office/drawing/2014/main" id="{5D7DDFB6-94A5-CBE2-B1B0-662B5D0EC71F}"/>
               </a:ext>
             </a:extLst>
           </p:cNvPr>
@@ -3665,8 +3814,8 @@
         </p:nvSpPr>
         <p:spPr>
           <a:xfrm>
-            <a:off x="135731" y="3244334"/>
-            <a:ext cx="2157413" cy="369332"/>
+            <a:off x="650503" y="1137144"/>
+            <a:ext cx="1381133" cy="923330"/>
           </a:xfrm>
           <a:prstGeom prst="rect">
             <a:avLst/>
@@ -3692,7 +3841,7 @@
             <a:pPr algn="ctr"/>
             <a:r>
               <a:rPr lang="en-US" dirty="0"/>
-              <a:t>Local Git Golder</a:t>
+              <a:t>Power BI Service (Prod Env)</a:t>
             </a:r>
             <a:endParaRPr lang="en-IN" dirty="0"/>
           </a:p>
@@ -3703,7 +3852,7 @@
           <p:cNvPr id="3" name="TextBox 2">
             <a:extLst>
               <a:ext uri="{FF2B5EF4-FFF2-40B4-BE49-F238E27FC236}">
-                <a16:creationId xmlns:a16="http://schemas.microsoft.com/office/drawing/2014/main" id="{79A341BC-91EC-1CEF-53B2-E00A322DB398}"/>
+                <a16:creationId xmlns:a16="http://schemas.microsoft.com/office/drawing/2014/main" id="{558C27AA-FAF0-5371-2045-DB204F27DCC6}"/>
               </a:ext>
             </a:extLst>
           </p:cNvPr>
@@ -3712,8 +3861,8 @@
         </p:nvSpPr>
         <p:spPr>
           <a:xfrm>
-            <a:off x="5674518" y="3142951"/>
-            <a:ext cx="2157413" cy="646331"/>
+            <a:off x="3945289" y="1138198"/>
+            <a:ext cx="1381133" cy="923330"/>
           </a:xfrm>
           <a:prstGeom prst="rect">
             <a:avLst/>
@@ -3739,14 +3888,7 @@
             <a:pPr algn="ctr"/>
             <a:r>
               <a:rPr lang="en-US" dirty="0"/>
-              <a:t>Git/DevOps </a:t>
-            </a:r>
-          </a:p>
-          <a:p>
-            <a:pPr algn="ctr"/>
-            <a:r>
-              <a:rPr lang="en-US" dirty="0" err="1"/>
-              <a:t>Branch_Dev</a:t>
+              <a:t>Azure DevOps (Prod Env)</a:t>
             </a:r>
             <a:endParaRPr lang="en-IN" dirty="0"/>
           </a:p>
@@ -3757,7 +3899,7 @@
           <p:cNvPr id="4" name="TextBox 3">
             <a:extLst>
               <a:ext uri="{FF2B5EF4-FFF2-40B4-BE49-F238E27FC236}">
-                <a16:creationId xmlns:a16="http://schemas.microsoft.com/office/drawing/2014/main" id="{7165D092-F634-2BF7-A37D-AC7F552C5497}"/>
+                <a16:creationId xmlns:a16="http://schemas.microsoft.com/office/drawing/2014/main" id="{A794000E-A165-695B-F226-720DC2A652D3}"/>
               </a:ext>
             </a:extLst>
           </p:cNvPr>
@@ -3766,8 +3908,8 @@
         </p:nvSpPr>
         <p:spPr>
           <a:xfrm>
-            <a:off x="10784680" y="3142951"/>
-            <a:ext cx="1078707" cy="646331"/>
+            <a:off x="6882517" y="1415197"/>
+            <a:ext cx="1381133" cy="369332"/>
           </a:xfrm>
           <a:prstGeom prst="rect">
             <a:avLst/>
@@ -3793,14 +3935,7 @@
             <a:pPr algn="ctr"/>
             <a:r>
               <a:rPr lang="en-US" dirty="0"/>
-              <a:t>Main</a:t>
-            </a:r>
-          </a:p>
-          <a:p>
-            <a:pPr algn="ctr"/>
-            <a:r>
-              <a:rPr lang="en-US" dirty="0"/>
-              <a:t>Branch</a:t>
+              <a:t>VS Code</a:t>
             </a:r>
             <a:endParaRPr lang="en-IN" dirty="0"/>
           </a:p>
@@ -3811,7 +3946,7 @@
           <p:cNvPr id="5" name="TextBox 4">
             <a:extLst>
               <a:ext uri="{FF2B5EF4-FFF2-40B4-BE49-F238E27FC236}">
-                <a16:creationId xmlns:a16="http://schemas.microsoft.com/office/drawing/2014/main" id="{604FFD46-36C0-7F48-24F9-EB051ADA83BE}"/>
+                <a16:creationId xmlns:a16="http://schemas.microsoft.com/office/drawing/2014/main" id="{537E69FF-CD58-1BB2-43C9-5BB95AE44689}"/>
               </a:ext>
             </a:extLst>
           </p:cNvPr>
@@ -3820,7 +3955,7 @@
         </p:nvSpPr>
         <p:spPr>
           <a:xfrm>
-            <a:off x="10648942" y="4410372"/>
+            <a:off x="9469797" y="1138198"/>
             <a:ext cx="1381133" cy="923330"/>
           </a:xfrm>
           <a:prstGeom prst="rect">
@@ -3847,6 +3982,489 @@
             <a:pPr algn="ctr"/>
             <a:r>
               <a:rPr lang="en-US" dirty="0"/>
+              <a:t>Local Repository Folder</a:t>
+            </a:r>
+            <a:endParaRPr lang="en-IN" dirty="0"/>
+          </a:p>
+        </p:txBody>
+      </p:sp>
+      <p:cxnSp>
+        <p:nvCxnSpPr>
+          <p:cNvPr id="6" name="Straight Arrow Connector 5">
+            <a:extLst>
+              <a:ext uri="{FF2B5EF4-FFF2-40B4-BE49-F238E27FC236}">
+                <a16:creationId xmlns:a16="http://schemas.microsoft.com/office/drawing/2014/main" id="{C1CF8FB9-D54C-5AA8-91EE-43FA4B68C2BE}"/>
+              </a:ext>
+            </a:extLst>
+          </p:cNvPr>
+          <p:cNvCxnSpPr>
+            <a:cxnSpLocks/>
+            <a:stCxn id="2" idx="3"/>
+            <a:endCxn id="3" idx="1"/>
+          </p:cNvCxnSpPr>
+          <p:nvPr/>
+        </p:nvCxnSpPr>
+        <p:spPr>
+          <a:xfrm>
+            <a:off x="2031636" y="1598809"/>
+            <a:ext cx="1913653" cy="1054"/>
+          </a:xfrm>
+          <a:prstGeom prst="straightConnector1">
+            <a:avLst/>
+          </a:prstGeom>
+          <a:ln w="19050">
+            <a:tailEnd type="triangle"/>
+          </a:ln>
+        </p:spPr>
+        <p:style>
+          <a:lnRef idx="1">
+            <a:schemeClr val="accent1"/>
+          </a:lnRef>
+          <a:fillRef idx="0">
+            <a:schemeClr val="accent1"/>
+          </a:fillRef>
+          <a:effectRef idx="0">
+            <a:schemeClr val="accent1"/>
+          </a:effectRef>
+          <a:fontRef idx="minor">
+            <a:schemeClr val="tx1"/>
+          </a:fontRef>
+        </p:style>
+      </p:cxnSp>
+      <p:cxnSp>
+        <p:nvCxnSpPr>
+          <p:cNvPr id="10" name="Straight Arrow Connector 9">
+            <a:extLst>
+              <a:ext uri="{FF2B5EF4-FFF2-40B4-BE49-F238E27FC236}">
+                <a16:creationId xmlns:a16="http://schemas.microsoft.com/office/drawing/2014/main" id="{790640C6-7B1F-1810-74E5-4733080A778A}"/>
+              </a:ext>
+            </a:extLst>
+          </p:cNvPr>
+          <p:cNvCxnSpPr>
+            <a:cxnSpLocks/>
+            <a:stCxn id="3" idx="3"/>
+            <a:endCxn id="4" idx="1"/>
+          </p:cNvCxnSpPr>
+          <p:nvPr/>
+        </p:nvCxnSpPr>
+        <p:spPr>
+          <a:xfrm>
+            <a:off x="5326422" y="1599863"/>
+            <a:ext cx="1556095" cy="0"/>
+          </a:xfrm>
+          <a:prstGeom prst="straightConnector1">
+            <a:avLst/>
+          </a:prstGeom>
+          <a:ln w="19050">
+            <a:tailEnd type="triangle"/>
+          </a:ln>
+        </p:spPr>
+        <p:style>
+          <a:lnRef idx="1">
+            <a:schemeClr val="accent1"/>
+          </a:lnRef>
+          <a:fillRef idx="0">
+            <a:schemeClr val="accent1"/>
+          </a:fillRef>
+          <a:effectRef idx="0">
+            <a:schemeClr val="accent1"/>
+          </a:effectRef>
+          <a:fontRef idx="minor">
+            <a:schemeClr val="tx1"/>
+          </a:fontRef>
+        </p:style>
+      </p:cxnSp>
+      <p:cxnSp>
+        <p:nvCxnSpPr>
+          <p:cNvPr id="13" name="Straight Arrow Connector 12">
+            <a:extLst>
+              <a:ext uri="{FF2B5EF4-FFF2-40B4-BE49-F238E27FC236}">
+                <a16:creationId xmlns:a16="http://schemas.microsoft.com/office/drawing/2014/main" id="{7B3E5C37-0342-82B6-45AA-4F68AC07D85E}"/>
+              </a:ext>
+            </a:extLst>
+          </p:cNvPr>
+          <p:cNvCxnSpPr>
+            <a:cxnSpLocks/>
+            <a:stCxn id="4" idx="3"/>
+            <a:endCxn id="5" idx="1"/>
+          </p:cNvCxnSpPr>
+          <p:nvPr/>
+        </p:nvCxnSpPr>
+        <p:spPr>
+          <a:xfrm>
+            <a:off x="8263650" y="1599863"/>
+            <a:ext cx="1206147" cy="0"/>
+          </a:xfrm>
+          <a:prstGeom prst="straightConnector1">
+            <a:avLst/>
+          </a:prstGeom>
+          <a:ln w="19050">
+            <a:tailEnd type="triangle"/>
+          </a:ln>
+        </p:spPr>
+        <p:style>
+          <a:lnRef idx="1">
+            <a:schemeClr val="accent1"/>
+          </a:lnRef>
+          <a:fillRef idx="0">
+            <a:schemeClr val="accent1"/>
+          </a:fillRef>
+          <a:effectRef idx="0">
+            <a:schemeClr val="accent1"/>
+          </a:effectRef>
+          <a:fontRef idx="minor">
+            <a:schemeClr val="tx1"/>
+          </a:fontRef>
+        </p:style>
+      </p:cxnSp>
+      <p:sp>
+        <p:nvSpPr>
+          <p:cNvPr id="20" name="TextBox 19">
+            <a:extLst>
+              <a:ext uri="{FF2B5EF4-FFF2-40B4-BE49-F238E27FC236}">
+                <a16:creationId xmlns:a16="http://schemas.microsoft.com/office/drawing/2014/main" id="{CD85FA12-36E0-7AD5-4BD4-F51E58FFC6E1}"/>
+              </a:ext>
+            </a:extLst>
+          </p:cNvPr>
+          <p:cNvSpPr txBox="1"/>
+          <p:nvPr/>
+        </p:nvSpPr>
+        <p:spPr>
+          <a:xfrm>
+            <a:off x="2218542" y="1310267"/>
+            <a:ext cx="1394292" cy="584775"/>
+          </a:xfrm>
+          <a:prstGeom prst="rect">
+            <a:avLst/>
+          </a:prstGeom>
+          <a:noFill/>
+        </p:spPr>
+        <p:txBody>
+          <a:bodyPr wrap="none" rtlCol="0">
+            <a:spAutoFit/>
+          </a:bodyPr>
+          <a:lstStyle/>
+          <a:p>
+            <a:r>
+              <a:rPr lang="en-US" sz="1600" dirty="0"/>
+              <a:t>Git Integration</a:t>
+            </a:r>
+          </a:p>
+          <a:p>
+            <a:r>
+              <a:rPr lang="en-US" sz="1600" dirty="0"/>
+              <a:t> in power BI</a:t>
+            </a:r>
+            <a:endParaRPr lang="en-IN" sz="1600" dirty="0"/>
+          </a:p>
+        </p:txBody>
+      </p:sp>
+      <p:sp>
+        <p:nvSpPr>
+          <p:cNvPr id="21" name="TextBox 20">
+            <a:extLst>
+              <a:ext uri="{FF2B5EF4-FFF2-40B4-BE49-F238E27FC236}">
+                <a16:creationId xmlns:a16="http://schemas.microsoft.com/office/drawing/2014/main" id="{AB807D75-8460-6E53-F0B9-A2159A5843BD}"/>
+              </a:ext>
+            </a:extLst>
+          </p:cNvPr>
+          <p:cNvSpPr txBox="1"/>
+          <p:nvPr/>
+        </p:nvSpPr>
+        <p:spPr>
+          <a:xfrm>
+            <a:off x="5593824" y="1267797"/>
+            <a:ext cx="1062086" cy="338554"/>
+          </a:xfrm>
+          <a:prstGeom prst="rect">
+            <a:avLst/>
+          </a:prstGeom>
+          <a:noFill/>
+        </p:spPr>
+        <p:txBody>
+          <a:bodyPr wrap="none" rtlCol="0">
+            <a:spAutoFit/>
+          </a:bodyPr>
+          <a:lstStyle/>
+          <a:p>
+            <a:r>
+              <a:rPr lang="en-US" sz="1600" dirty="0"/>
+              <a:t>First Clone</a:t>
+            </a:r>
+            <a:endParaRPr lang="en-IN" sz="1600" dirty="0"/>
+          </a:p>
+        </p:txBody>
+      </p:sp>
+      <p:sp>
+        <p:nvSpPr>
+          <p:cNvPr id="22" name="TextBox 21">
+            <a:extLst>
+              <a:ext uri="{FF2B5EF4-FFF2-40B4-BE49-F238E27FC236}">
+                <a16:creationId xmlns:a16="http://schemas.microsoft.com/office/drawing/2014/main" id="{DF2D6616-49B3-79AF-9F3E-E41B3F558954}"/>
+              </a:ext>
+            </a:extLst>
+          </p:cNvPr>
+          <p:cNvSpPr txBox="1"/>
+          <p:nvPr/>
+        </p:nvSpPr>
+        <p:spPr>
+          <a:xfrm>
+            <a:off x="5521374" y="1555107"/>
+            <a:ext cx="1252138" cy="584775"/>
+          </a:xfrm>
+          <a:prstGeom prst="rect">
+            <a:avLst/>
+          </a:prstGeom>
+          <a:noFill/>
+        </p:spPr>
+        <p:txBody>
+          <a:bodyPr wrap="none" rtlCol="0">
+            <a:spAutoFit/>
+          </a:bodyPr>
+          <a:lstStyle/>
+          <a:p>
+            <a:pPr algn="ctr"/>
+            <a:r>
+              <a:rPr lang="en-US" sz="1600" dirty="0"/>
+              <a:t>Next time </a:t>
+            </a:r>
+          </a:p>
+          <a:p>
+            <a:pPr algn="ctr"/>
+            <a:r>
+              <a:rPr lang="en-US" sz="1600" dirty="0"/>
+              <a:t>onwards Pull</a:t>
+            </a:r>
+            <a:endParaRPr lang="en-IN" sz="1600" dirty="0"/>
+          </a:p>
+        </p:txBody>
+      </p:sp>
+    </p:spTree>
+    <p:extLst>
+      <p:ext uri="{BB962C8B-B14F-4D97-AF65-F5344CB8AC3E}">
+        <p14:creationId xmlns:p14="http://schemas.microsoft.com/office/powerpoint/2010/main" val="3743157601"/>
+      </p:ext>
+    </p:extLst>
+  </p:cSld>
+  <p:clrMapOvr>
+    <a:masterClrMapping/>
+  </p:clrMapOvr>
+</p:sld>
+</file>
+
+<file path=ppt/slides/slide3.xml><?xml version="1.0" encoding="utf-8"?>
+<p:sld xmlns:a="http://schemas.openxmlformats.org/drawingml/2006/main" xmlns:r="http://schemas.openxmlformats.org/officeDocument/2006/relationships" xmlns:p="http://schemas.openxmlformats.org/presentationml/2006/main">
+  <p:cSld>
+    <p:spTree>
+      <p:nvGrpSpPr>
+        <p:cNvPr id="1" name=""/>
+        <p:cNvGrpSpPr/>
+        <p:nvPr/>
+      </p:nvGrpSpPr>
+      <p:grpSpPr>
+        <a:xfrm>
+          <a:off x="0" y="0"/>
+          <a:ext cx="0" cy="0"/>
+          <a:chOff x="0" y="0"/>
+          <a:chExt cx="0" cy="0"/>
+        </a:xfrm>
+      </p:grpSpPr>
+      <p:sp>
+        <p:nvSpPr>
+          <p:cNvPr id="2" name="TextBox 1">
+            <a:extLst>
+              <a:ext uri="{FF2B5EF4-FFF2-40B4-BE49-F238E27FC236}">
+                <a16:creationId xmlns:a16="http://schemas.microsoft.com/office/drawing/2014/main" id="{0325F2A5-39AF-28FE-0AB1-D3C8721C39F8}"/>
+              </a:ext>
+            </a:extLst>
+          </p:cNvPr>
+          <p:cNvSpPr txBox="1"/>
+          <p:nvPr/>
+        </p:nvSpPr>
+        <p:spPr>
+          <a:xfrm>
+            <a:off x="135731" y="3244334"/>
+            <a:ext cx="2157413" cy="369332"/>
+          </a:xfrm>
+          <a:prstGeom prst="rect">
+            <a:avLst/>
+          </a:prstGeom>
+          <a:solidFill>
+            <a:schemeClr val="accent2">
+              <a:lumMod val="20000"/>
+              <a:lumOff val="80000"/>
+            </a:schemeClr>
+          </a:solidFill>
+          <a:ln>
+            <a:solidFill>
+              <a:schemeClr val="accent1"/>
+            </a:solidFill>
+          </a:ln>
+        </p:spPr>
+        <p:txBody>
+          <a:bodyPr wrap="square" rtlCol="0">
+            <a:spAutoFit/>
+          </a:bodyPr>
+          <a:lstStyle/>
+          <a:p>
+            <a:pPr algn="ctr"/>
+            <a:r>
+              <a:rPr lang="en-US" dirty="0"/>
+              <a:t>Local Git Golder</a:t>
+            </a:r>
+            <a:endParaRPr lang="en-IN" dirty="0"/>
+          </a:p>
+        </p:txBody>
+      </p:sp>
+      <p:sp>
+        <p:nvSpPr>
+          <p:cNvPr id="3" name="TextBox 2">
+            <a:extLst>
+              <a:ext uri="{FF2B5EF4-FFF2-40B4-BE49-F238E27FC236}">
+                <a16:creationId xmlns:a16="http://schemas.microsoft.com/office/drawing/2014/main" id="{79A341BC-91EC-1CEF-53B2-E00A322DB398}"/>
+              </a:ext>
+            </a:extLst>
+          </p:cNvPr>
+          <p:cNvSpPr txBox="1"/>
+          <p:nvPr/>
+        </p:nvSpPr>
+        <p:spPr>
+          <a:xfrm>
+            <a:off x="5674518" y="3142951"/>
+            <a:ext cx="2157413" cy="646331"/>
+          </a:xfrm>
+          <a:prstGeom prst="rect">
+            <a:avLst/>
+          </a:prstGeom>
+          <a:solidFill>
+            <a:schemeClr val="accent2">
+              <a:lumMod val="20000"/>
+              <a:lumOff val="80000"/>
+            </a:schemeClr>
+          </a:solidFill>
+          <a:ln>
+            <a:solidFill>
+              <a:schemeClr val="accent1"/>
+            </a:solidFill>
+          </a:ln>
+        </p:spPr>
+        <p:txBody>
+          <a:bodyPr wrap="square" rtlCol="0">
+            <a:spAutoFit/>
+          </a:bodyPr>
+          <a:lstStyle/>
+          <a:p>
+            <a:pPr algn="ctr"/>
+            <a:r>
+              <a:rPr lang="en-US" dirty="0"/>
+              <a:t>Git/DevOps </a:t>
+            </a:r>
+          </a:p>
+          <a:p>
+            <a:pPr algn="ctr"/>
+            <a:r>
+              <a:rPr lang="en-US" dirty="0" err="1"/>
+              <a:t>Branch_Dev</a:t>
+            </a:r>
+            <a:endParaRPr lang="en-IN" dirty="0"/>
+          </a:p>
+        </p:txBody>
+      </p:sp>
+      <p:sp>
+        <p:nvSpPr>
+          <p:cNvPr id="4" name="TextBox 3">
+            <a:extLst>
+              <a:ext uri="{FF2B5EF4-FFF2-40B4-BE49-F238E27FC236}">
+                <a16:creationId xmlns:a16="http://schemas.microsoft.com/office/drawing/2014/main" id="{7165D092-F634-2BF7-A37D-AC7F552C5497}"/>
+              </a:ext>
+            </a:extLst>
+          </p:cNvPr>
+          <p:cNvSpPr txBox="1"/>
+          <p:nvPr/>
+        </p:nvSpPr>
+        <p:spPr>
+          <a:xfrm>
+            <a:off x="10784680" y="3142951"/>
+            <a:ext cx="1078707" cy="646331"/>
+          </a:xfrm>
+          <a:prstGeom prst="rect">
+            <a:avLst/>
+          </a:prstGeom>
+          <a:solidFill>
+            <a:schemeClr val="accent2">
+              <a:lumMod val="20000"/>
+              <a:lumOff val="80000"/>
+            </a:schemeClr>
+          </a:solidFill>
+          <a:ln>
+            <a:solidFill>
+              <a:schemeClr val="accent1"/>
+            </a:solidFill>
+          </a:ln>
+        </p:spPr>
+        <p:txBody>
+          <a:bodyPr wrap="square" rtlCol="0">
+            <a:spAutoFit/>
+          </a:bodyPr>
+          <a:lstStyle/>
+          <a:p>
+            <a:pPr algn="ctr"/>
+            <a:r>
+              <a:rPr lang="en-US" dirty="0"/>
+              <a:t>Main</a:t>
+            </a:r>
+          </a:p>
+          <a:p>
+            <a:pPr algn="ctr"/>
+            <a:r>
+              <a:rPr lang="en-US" dirty="0"/>
+              <a:t>Branch</a:t>
+            </a:r>
+            <a:endParaRPr lang="en-IN" dirty="0"/>
+          </a:p>
+        </p:txBody>
+      </p:sp>
+      <p:sp>
+        <p:nvSpPr>
+          <p:cNvPr id="5" name="TextBox 4">
+            <a:extLst>
+              <a:ext uri="{FF2B5EF4-FFF2-40B4-BE49-F238E27FC236}">
+                <a16:creationId xmlns:a16="http://schemas.microsoft.com/office/drawing/2014/main" id="{604FFD46-36C0-7F48-24F9-EB051ADA83BE}"/>
+              </a:ext>
+            </a:extLst>
+          </p:cNvPr>
+          <p:cNvSpPr txBox="1"/>
+          <p:nvPr/>
+        </p:nvSpPr>
+        <p:spPr>
+          <a:xfrm>
+            <a:off x="10648942" y="4410372"/>
+            <a:ext cx="1381133" cy="923330"/>
+          </a:xfrm>
+          <a:prstGeom prst="rect">
+            <a:avLst/>
+          </a:prstGeom>
+          <a:solidFill>
+            <a:schemeClr val="accent2">
+              <a:lumMod val="20000"/>
+              <a:lumOff val="80000"/>
+            </a:schemeClr>
+          </a:solidFill>
+          <a:ln>
+            <a:solidFill>
+              <a:schemeClr val="accent1"/>
+            </a:solidFill>
+          </a:ln>
+        </p:spPr>
+        <p:txBody>
+          <a:bodyPr wrap="square" rtlCol="0">
+            <a:spAutoFit/>
+          </a:bodyPr>
+          <a:lstStyle/>
+          <a:p>
+            <a:pPr algn="ctr"/>
+            <a:r>
+              <a:rPr lang="en-US" dirty="0"/>
               <a:t>Power BI Service (Prod Env)</a:t>
             </a:r>
             <a:endParaRPr lang="en-IN" dirty="0"/>
@@ -3914,7 +4532,7 @@
         </p:nvSpPr>
         <p:spPr>
           <a:xfrm>
-            <a:off x="2907504" y="3645754"/>
+            <a:off x="2909885" y="3285498"/>
             <a:ext cx="2157413" cy="369332"/>
           </a:xfrm>
           <a:prstGeom prst="rect">
@@ -4003,13 +4621,15 @@
           </p:cNvPr>
           <p:cNvCxnSpPr>
             <a:cxnSpLocks/>
+            <a:stCxn id="2" idx="3"/>
+            <a:endCxn id="7" idx="1"/>
           </p:cNvCxnSpPr>
           <p:nvPr/>
         </p:nvCxnSpPr>
         <p:spPr>
           <a:xfrm>
             <a:off x="2293144" y="3429000"/>
-            <a:ext cx="614360" cy="401420"/>
+            <a:ext cx="616741" cy="41164"/>
           </a:xfrm>
           <a:prstGeom prst="straightConnector1">
             <a:avLst/>
@@ -4085,13 +4705,15 @@
           </p:cNvPr>
           <p:cNvCxnSpPr>
             <a:cxnSpLocks/>
+            <a:stCxn id="7" idx="3"/>
+            <a:endCxn id="3" idx="1"/>
           </p:cNvCxnSpPr>
           <p:nvPr/>
         </p:nvCxnSpPr>
         <p:spPr>
           <a:xfrm flipV="1">
-            <a:off x="5064917" y="3466117"/>
-            <a:ext cx="609601" cy="364303"/>
+            <a:off x="5067298" y="3466117"/>
+            <a:ext cx="607220" cy="4047"/>
           </a:xfrm>
           <a:prstGeom prst="straightConnector1">
             <a:avLst/>
@@ -4706,6 +5328,139 @@
           </a:p>
         </p:txBody>
       </p:sp>
+      <p:sp>
+        <p:nvSpPr>
+          <p:cNvPr id="8" name="TextBox 7">
+            <a:extLst>
+              <a:ext uri="{FF2B5EF4-FFF2-40B4-BE49-F238E27FC236}">
+                <a16:creationId xmlns:a16="http://schemas.microsoft.com/office/drawing/2014/main" id="{5C866E3A-AD2F-ABA6-52F1-0C3ABD2D03DB}"/>
+              </a:ext>
+            </a:extLst>
+          </p:cNvPr>
+          <p:cNvSpPr txBox="1"/>
+          <p:nvPr/>
+        </p:nvSpPr>
+        <p:spPr>
+          <a:xfrm>
+            <a:off x="2901774" y="3962057"/>
+            <a:ext cx="2157413" cy="369332"/>
+          </a:xfrm>
+          <a:prstGeom prst="rect">
+            <a:avLst/>
+          </a:prstGeom>
+          <a:solidFill>
+            <a:schemeClr val="accent2">
+              <a:lumMod val="20000"/>
+              <a:lumOff val="80000"/>
+            </a:schemeClr>
+          </a:solidFill>
+          <a:ln>
+            <a:solidFill>
+              <a:schemeClr val="accent1"/>
+            </a:solidFill>
+          </a:ln>
+        </p:spPr>
+        <p:txBody>
+          <a:bodyPr wrap="square" rtlCol="0">
+            <a:spAutoFit/>
+          </a:bodyPr>
+          <a:lstStyle/>
+          <a:p>
+            <a:pPr algn="ctr"/>
+            <a:r>
+              <a:rPr lang="en-US" dirty="0"/>
+              <a:t>Command prompt</a:t>
+            </a:r>
+            <a:endParaRPr lang="en-IN" dirty="0"/>
+          </a:p>
+        </p:txBody>
+      </p:sp>
+      <p:cxnSp>
+        <p:nvCxnSpPr>
+          <p:cNvPr id="10" name="Straight Arrow Connector 9">
+            <a:extLst>
+              <a:ext uri="{FF2B5EF4-FFF2-40B4-BE49-F238E27FC236}">
+                <a16:creationId xmlns:a16="http://schemas.microsoft.com/office/drawing/2014/main" id="{CE6D113B-E51B-499C-4CF9-3C67F35663D5}"/>
+              </a:ext>
+            </a:extLst>
+          </p:cNvPr>
+          <p:cNvCxnSpPr>
+            <a:cxnSpLocks/>
+            <a:stCxn id="2" idx="3"/>
+            <a:endCxn id="8" idx="1"/>
+          </p:cNvCxnSpPr>
+          <p:nvPr/>
+        </p:nvCxnSpPr>
+        <p:spPr>
+          <a:xfrm>
+            <a:off x="2293144" y="3429000"/>
+            <a:ext cx="608630" cy="717723"/>
+          </a:xfrm>
+          <a:prstGeom prst="straightConnector1">
+            <a:avLst/>
+          </a:prstGeom>
+          <a:ln w="19050">
+            <a:tailEnd type="triangle"/>
+          </a:ln>
+        </p:spPr>
+        <p:style>
+          <a:lnRef idx="1">
+            <a:schemeClr val="accent1"/>
+          </a:lnRef>
+          <a:fillRef idx="0">
+            <a:schemeClr val="accent1"/>
+          </a:fillRef>
+          <a:effectRef idx="0">
+            <a:schemeClr val="accent1"/>
+          </a:effectRef>
+          <a:fontRef idx="minor">
+            <a:schemeClr val="tx1"/>
+          </a:fontRef>
+        </p:style>
+      </p:cxnSp>
+      <p:cxnSp>
+        <p:nvCxnSpPr>
+          <p:cNvPr id="25" name="Straight Arrow Connector 24">
+            <a:extLst>
+              <a:ext uri="{FF2B5EF4-FFF2-40B4-BE49-F238E27FC236}">
+                <a16:creationId xmlns:a16="http://schemas.microsoft.com/office/drawing/2014/main" id="{07E62AB7-3895-4B87-9764-3D78B31D6A68}"/>
+              </a:ext>
+            </a:extLst>
+          </p:cNvPr>
+          <p:cNvCxnSpPr>
+            <a:cxnSpLocks/>
+            <a:stCxn id="8" idx="3"/>
+            <a:endCxn id="3" idx="1"/>
+          </p:cNvCxnSpPr>
+          <p:nvPr/>
+        </p:nvCxnSpPr>
+        <p:spPr>
+          <a:xfrm flipV="1">
+            <a:off x="5059187" y="3466117"/>
+            <a:ext cx="615331" cy="680606"/>
+          </a:xfrm>
+          <a:prstGeom prst="straightConnector1">
+            <a:avLst/>
+          </a:prstGeom>
+          <a:ln w="19050">
+            <a:tailEnd type="triangle"/>
+          </a:ln>
+        </p:spPr>
+        <p:style>
+          <a:lnRef idx="1">
+            <a:schemeClr val="accent1"/>
+          </a:lnRef>
+          <a:fillRef idx="0">
+            <a:schemeClr val="accent1"/>
+          </a:fillRef>
+          <a:effectRef idx="0">
+            <a:schemeClr val="accent1"/>
+          </a:effectRef>
+          <a:fontRef idx="minor">
+            <a:schemeClr val="tx1"/>
+          </a:fontRef>
+        </p:style>
+      </p:cxnSp>
     </p:spTree>
     <p:extLst>
       <p:ext uri="{BB962C8B-B14F-4D97-AF65-F5344CB8AC3E}">
@@ -5012,4 +5767,10 @@
     </a:ext>
   </a:extLst>
 </a:theme>
+</file>
+
+<file path=docMetadata/LabelInfo.xml><?xml version="1.0" encoding="utf-8"?>
+<clbl:labelList xmlns:clbl="http://schemas.microsoft.com/office/2020/mipLabelMetadata">
+  <clbl:label id="{1b5d643d-5daa-4182-b4ec-05c4e602cf56}" enabled="1" method="Privileged" siteId="{50f40674-931c-4d09-ae8a-bb8fde36b912}" removed="0"/>
+</clbl:labelList>
 </file>